--- a/teaching/fvTheorySlides/Course-Intro.pptx
+++ b/teaching/fvTheorySlides/Course-Intro.pptx
@@ -1607,6 +1607,25 @@
                 <a:ea typeface="Cambria" panose="02040503050406030204" pitchFamily="18" charset="0"/>
               </a:rPr>
               <a:t>Automata Theory, Logic, and Formal Verification</a:t>
+            </a:r>
+            <a:br>
+              <a:rPr lang="en-US" sz="3200" dirty="0">
+                <a:latin typeface="Cambria" panose="02040503050406030204" pitchFamily="18" charset="0"/>
+                <a:ea typeface="Cambria" panose="02040503050406030204" pitchFamily="18" charset="0"/>
+              </a:rPr>
+            </a:br>
+            <a:br>
+              <a:rPr lang="en-US" sz="3200" dirty="0">
+                <a:latin typeface="Cambria" panose="02040503050406030204" pitchFamily="18" charset="0"/>
+                <a:ea typeface="Cambria" panose="02040503050406030204" pitchFamily="18" charset="0"/>
+              </a:rPr>
+            </a:br>
+            <a:r>
+              <a:rPr lang="en-US" sz="3200" dirty="0">
+                <a:latin typeface="Cambria" panose="02040503050406030204" pitchFamily="18" charset="0"/>
+                <a:ea typeface="Cambria" panose="02040503050406030204" pitchFamily="18" charset="0"/>
+              </a:rPr>
+              <a:t>Course Introduction</a:t>
             </a:r>
           </a:p>
         </p:txBody>
